--- a/22011P0504 - greeshma prc.pptx
+++ b/22011P0504 - greeshma prc.pptx
@@ -8,7 +8,7 @@
     <p:notesMasterId r:id="rId17"/>
   </p:notesMasterIdLst>
   <p:sldIdLst>
-    <p:sldId id="257" r:id="rId2"/>
+    <p:sldId id="272" r:id="rId2"/>
     <p:sldId id="258" r:id="rId3"/>
     <p:sldId id="259" r:id="rId4"/>
     <p:sldId id="260" r:id="rId5"/>
@@ -3827,366 +3827,10 @@
       </p:grpSpPr>
       <p:sp>
         <p:nvSpPr>
-          <p:cNvPr id="2" name="TextBox 1">
+          <p:cNvPr id="2" name="Slide Number Placeholder 1">
             <a:extLst>
               <a:ext uri="{FF2B5EF4-FFF2-40B4-BE49-F238E27FC236}">
-                <a16:creationId xmlns:a16="http://schemas.microsoft.com/office/drawing/2014/main" id="{7278DB7C-A6B3-5C74-D816-35798B7D1814}"/>
-              </a:ext>
-            </a:extLst>
-          </p:cNvPr>
-          <p:cNvSpPr txBox="1"/>
-          <p:nvPr/>
-        </p:nvSpPr>
-        <p:spPr>
-          <a:xfrm>
-            <a:off x="1064443" y="454933"/>
-            <a:ext cx="9973558" cy="2369880"/>
-          </a:xfrm>
-          <a:prstGeom prst="rect">
-            <a:avLst/>
-          </a:prstGeom>
-          <a:noFill/>
-        </p:spPr>
-        <p:txBody>
-          <a:bodyPr wrap="square" rtlCol="0">
-            <a:spAutoFit/>
-          </a:bodyPr>
-          <a:lstStyle/>
-          <a:p>
-            <a:pPr algn="ctr"/>
-            <a:r>
-              <a:rPr lang="en-US" sz="2200" b="1" dirty="0" err="1">
-                <a:latin typeface="Times New Roman" panose="02020603050405020304" pitchFamily="18" charset="0"/>
-                <a:cs typeface="Times New Roman" panose="02020603050405020304" pitchFamily="18" charset="0"/>
-              </a:rPr>
-              <a:t>Analysing</a:t>
-            </a:r>
-            <a:r>
-              <a:rPr lang="en-US" sz="2200" b="1" dirty="0">
-                <a:latin typeface="Times New Roman" panose="02020603050405020304" pitchFamily="18" charset="0"/>
-                <a:cs typeface="Times New Roman" panose="02020603050405020304" pitchFamily="18" charset="0"/>
-              </a:rPr>
-              <a:t> the Performance and Fairness of Machine Learning-based Depression Screening: Using NHANES Data Across the </a:t>
-            </a:r>
-          </a:p>
-          <a:p>
-            <a:pPr algn="ctr"/>
-            <a:r>
-              <a:rPr lang="en-US" sz="2200" b="1" dirty="0">
-                <a:latin typeface="Times New Roman" panose="02020603050405020304" pitchFamily="18" charset="0"/>
-                <a:cs typeface="Times New Roman" panose="02020603050405020304" pitchFamily="18" charset="0"/>
-              </a:rPr>
-              <a:t>COVID-19 Period </a:t>
-            </a:r>
-            <a:endParaRPr lang="en-US" sz="2100" dirty="0">
-              <a:latin typeface="Times New Roman" panose="02020603050405020304" pitchFamily="18" charset="0"/>
-              <a:cs typeface="Times New Roman" panose="02020603050405020304" pitchFamily="18" charset="0"/>
-            </a:endParaRPr>
-          </a:p>
-          <a:p>
-            <a:pPr algn="ctr"/>
-            <a:endParaRPr lang="en-US" sz="2100" dirty="0">
-              <a:latin typeface="Times New Roman" panose="02020603050405020304" pitchFamily="18" charset="0"/>
-              <a:cs typeface="Times New Roman" panose="02020603050405020304" pitchFamily="18" charset="0"/>
-            </a:endParaRPr>
-          </a:p>
-          <a:p>
-            <a:pPr algn="ctr"/>
-            <a:r>
-              <a:rPr lang="en-US" sz="2000" u="sng" dirty="0">
-                <a:latin typeface="Times New Roman" panose="02020603050405020304" pitchFamily="18" charset="0"/>
-                <a:cs typeface="Times New Roman" panose="02020603050405020304" pitchFamily="18" charset="0"/>
-              </a:rPr>
-              <a:t>DISSERTATION WORK REVIEW – I</a:t>
-            </a:r>
-          </a:p>
-          <a:p>
-            <a:pPr algn="ctr"/>
-            <a:r>
-              <a:rPr lang="en-US" sz="2000" dirty="0">
-                <a:latin typeface="Times New Roman" panose="02020603050405020304" pitchFamily="18" charset="0"/>
-                <a:cs typeface="Times New Roman" panose="02020603050405020304" pitchFamily="18" charset="0"/>
-              </a:rPr>
-              <a:t>AUGUST 2026</a:t>
-            </a:r>
-          </a:p>
-          <a:p>
-            <a:pPr algn="ctr"/>
-            <a:endParaRPr lang="en-IN" sz="2100" dirty="0">
-              <a:latin typeface="Times New Roman" panose="02020603050405020304" pitchFamily="18" charset="0"/>
-              <a:cs typeface="Times New Roman" panose="02020603050405020304" pitchFamily="18" charset="0"/>
-            </a:endParaRPr>
-          </a:p>
-        </p:txBody>
-      </p:sp>
-      <p:sp>
-        <p:nvSpPr>
-          <p:cNvPr id="3" name="TextBox 2">
-            <a:extLst>
-              <a:ext uri="{FF2B5EF4-FFF2-40B4-BE49-F238E27FC236}">
-                <a16:creationId xmlns:a16="http://schemas.microsoft.com/office/drawing/2014/main" id="{832C37C9-65D1-4960-CD93-506B82AEE2E8}"/>
-              </a:ext>
-            </a:extLst>
-          </p:cNvPr>
-          <p:cNvSpPr txBox="1"/>
-          <p:nvPr/>
-        </p:nvSpPr>
-        <p:spPr>
-          <a:xfrm>
-            <a:off x="1482369" y="2998049"/>
-            <a:ext cx="10427615" cy="1261884"/>
-          </a:xfrm>
-          <a:prstGeom prst="rect">
-            <a:avLst/>
-          </a:prstGeom>
-          <a:noFill/>
-        </p:spPr>
-        <p:txBody>
-          <a:bodyPr wrap="square" rtlCol="0">
-            <a:spAutoFit/>
-          </a:bodyPr>
-          <a:lstStyle/>
-          <a:p>
-            <a:pPr algn="ctr"/>
-            <a:r>
-              <a:rPr lang="en-IN" sz="1900" b="1" dirty="0">
-                <a:latin typeface="Times New Roman" panose="02020603050405020304" pitchFamily="18" charset="0"/>
-                <a:cs typeface="Times New Roman" panose="02020603050405020304" pitchFamily="18" charset="0"/>
-              </a:rPr>
-              <a:t>UNIVERSITY COLLEGE OF ENGINEERING, SCIENCE AND TECHNOLOGY HYDERABAD</a:t>
-            </a:r>
-          </a:p>
-          <a:p>
-            <a:pPr algn="ctr"/>
-            <a:r>
-              <a:rPr lang="en-IN" sz="1900" b="1" dirty="0">
-                <a:latin typeface="Times New Roman" panose="02020603050405020304" pitchFamily="18" charset="0"/>
-                <a:cs typeface="Times New Roman" panose="02020603050405020304" pitchFamily="18" charset="0"/>
-              </a:rPr>
-              <a:t>JAWAHARLAL NEHRU TECHNOLOGICAL UNIVERSITY HYDERABAD (JNTUH-UCESTH)</a:t>
-            </a:r>
-          </a:p>
-          <a:p>
-            <a:pPr algn="ctr"/>
-            <a:endParaRPr lang="en-IN" sz="1900" b="1" dirty="0">
-              <a:latin typeface="Times New Roman" panose="02020603050405020304" pitchFamily="18" charset="0"/>
-              <a:cs typeface="Times New Roman" panose="02020603050405020304" pitchFamily="18" charset="0"/>
-            </a:endParaRPr>
-          </a:p>
-          <a:p>
-            <a:r>
-              <a:rPr lang="en-IN" sz="1900" b="1" dirty="0">
-                <a:latin typeface="Times New Roman" panose="02020603050405020304" pitchFamily="18" charset="0"/>
-                <a:cs typeface="Times New Roman" panose="02020603050405020304" pitchFamily="18" charset="0"/>
-              </a:rPr>
-              <a:t>                      DEPARTMENT OF COMPUTER SCIENCE AND ENGINEERING</a:t>
-            </a:r>
-          </a:p>
-        </p:txBody>
-      </p:sp>
-      <p:pic>
-        <p:nvPicPr>
-          <p:cNvPr id="5" name="Picture 4">
-            <a:extLst>
-              <a:ext uri="{FF2B5EF4-FFF2-40B4-BE49-F238E27FC236}">
-                <a16:creationId xmlns:a16="http://schemas.microsoft.com/office/drawing/2014/main" id="{6A73F946-FB44-6947-34E8-776278BD554A}"/>
-              </a:ext>
-            </a:extLst>
-          </p:cNvPr>
-          <p:cNvPicPr>
-            <a:picLocks noChangeAspect="1"/>
-          </p:cNvPicPr>
-          <p:nvPr/>
-        </p:nvPicPr>
-        <p:blipFill>
-          <a:blip r:embed="rId2"/>
-          <a:stretch>
-            <a:fillRect/>
-          </a:stretch>
-        </p:blipFill>
-        <p:spPr>
-          <a:xfrm>
-            <a:off x="240777" y="3189675"/>
-            <a:ext cx="1225487" cy="1070258"/>
-          </a:xfrm>
-          <a:prstGeom prst="rect">
-            <a:avLst/>
-          </a:prstGeom>
-        </p:spPr>
-      </p:pic>
-      <p:sp>
-        <p:nvSpPr>
-          <p:cNvPr id="6" name="TextBox 5">
-            <a:extLst>
-              <a:ext uri="{FF2B5EF4-FFF2-40B4-BE49-F238E27FC236}">
-                <a16:creationId xmlns:a16="http://schemas.microsoft.com/office/drawing/2014/main" id="{82950CDA-E4C8-1218-C4B7-3B51B8A5328F}"/>
-              </a:ext>
-            </a:extLst>
-          </p:cNvPr>
-          <p:cNvSpPr txBox="1"/>
-          <p:nvPr/>
-        </p:nvSpPr>
-        <p:spPr>
-          <a:xfrm>
-            <a:off x="688155" y="5147527"/>
-            <a:ext cx="4598375" cy="923330"/>
-          </a:xfrm>
-          <a:prstGeom prst="rect">
-            <a:avLst/>
-          </a:prstGeom>
-          <a:noFill/>
-        </p:spPr>
-        <p:txBody>
-          <a:bodyPr wrap="none" rtlCol="0">
-            <a:spAutoFit/>
-          </a:bodyPr>
-          <a:lstStyle/>
-          <a:p>
-            <a:r>
-              <a:rPr lang="en-IN" u="sng" dirty="0">
-                <a:latin typeface="Times New Roman" panose="02020603050405020304" pitchFamily="18" charset="0"/>
-                <a:cs typeface="Times New Roman" panose="02020603050405020304" pitchFamily="18" charset="0"/>
-              </a:rPr>
-              <a:t>Guide</a:t>
-            </a:r>
-            <a:r>
-              <a:rPr lang="en-IN" dirty="0">
-                <a:latin typeface="Times New Roman" panose="02020603050405020304" pitchFamily="18" charset="0"/>
-                <a:cs typeface="Times New Roman" panose="02020603050405020304" pitchFamily="18" charset="0"/>
-              </a:rPr>
-              <a:t>:</a:t>
-            </a:r>
-          </a:p>
-          <a:p>
-            <a:r>
-              <a:rPr lang="en-IN" dirty="0">
-                <a:latin typeface="Times New Roman" panose="02020603050405020304" pitchFamily="18" charset="0"/>
-                <a:cs typeface="Times New Roman" panose="02020603050405020304" pitchFamily="18" charset="0"/>
-              </a:rPr>
-              <a:t>Dr. B. Kranthi Kiran</a:t>
-            </a:r>
-          </a:p>
-          <a:p>
-            <a:r>
-              <a:rPr lang="en-IN" dirty="0">
-                <a:latin typeface="Times New Roman" panose="02020603050405020304" pitchFamily="18" charset="0"/>
-                <a:cs typeface="Times New Roman" panose="02020603050405020304" pitchFamily="18" charset="0"/>
-              </a:rPr>
-              <a:t>Professor &amp; Coordinator – SC/ST Cell, JNTUH</a:t>
-            </a:r>
-          </a:p>
-        </p:txBody>
-      </p:sp>
-      <p:sp>
-        <p:nvSpPr>
-          <p:cNvPr id="7" name="TextBox 6">
-            <a:extLst>
-              <a:ext uri="{FF2B5EF4-FFF2-40B4-BE49-F238E27FC236}">
-                <a16:creationId xmlns:a16="http://schemas.microsoft.com/office/drawing/2014/main" id="{E2C1084A-47C2-2209-091A-8E58A5570DE6}"/>
-              </a:ext>
-            </a:extLst>
-          </p:cNvPr>
-          <p:cNvSpPr txBox="1"/>
-          <p:nvPr/>
-        </p:nvSpPr>
-        <p:spPr>
-          <a:xfrm>
-            <a:off x="8261270" y="5147527"/>
-            <a:ext cx="2960554" cy="1200329"/>
-          </a:xfrm>
-          <a:prstGeom prst="rect">
-            <a:avLst/>
-          </a:prstGeom>
-          <a:noFill/>
-        </p:spPr>
-        <p:txBody>
-          <a:bodyPr wrap="none" rtlCol="0">
-            <a:spAutoFit/>
-          </a:bodyPr>
-          <a:lstStyle/>
-          <a:p>
-            <a:r>
-              <a:rPr lang="en-IN" u="sng" dirty="0">
-                <a:latin typeface="Times New Roman" panose="02020603050405020304" pitchFamily="18" charset="0"/>
-                <a:cs typeface="Times New Roman" panose="02020603050405020304" pitchFamily="18" charset="0"/>
-              </a:rPr>
-              <a:t>Presented by</a:t>
-            </a:r>
-            <a:r>
-              <a:rPr lang="en-IN" dirty="0">
-                <a:latin typeface="Times New Roman" panose="02020603050405020304" pitchFamily="18" charset="0"/>
-                <a:cs typeface="Times New Roman" panose="02020603050405020304" pitchFamily="18" charset="0"/>
-              </a:rPr>
-              <a:t>:</a:t>
-            </a:r>
-          </a:p>
-          <a:p>
-            <a:r>
-              <a:rPr lang="en-IN" dirty="0">
-                <a:latin typeface="Times New Roman" panose="02020603050405020304" pitchFamily="18" charset="0"/>
-                <a:cs typeface="Times New Roman" panose="02020603050405020304" pitchFamily="18" charset="0"/>
-              </a:rPr>
-              <a:t>Kurivella Greeshma</a:t>
-            </a:r>
-          </a:p>
-          <a:p>
-            <a:r>
-              <a:rPr lang="en-IN" dirty="0">
-                <a:latin typeface="Times New Roman" panose="02020603050405020304" pitchFamily="18" charset="0"/>
-                <a:cs typeface="Times New Roman" panose="02020603050405020304" pitchFamily="18" charset="0"/>
-              </a:rPr>
-              <a:t>22011P0504</a:t>
-            </a:r>
-          </a:p>
-          <a:p>
-            <a:r>
-              <a:rPr lang="en-IN" dirty="0">
-                <a:latin typeface="Times New Roman" panose="02020603050405020304" pitchFamily="18" charset="0"/>
-                <a:cs typeface="Times New Roman" panose="02020603050405020304" pitchFamily="18" charset="0"/>
-              </a:rPr>
-              <a:t>CSE IDP 5</a:t>
-            </a:r>
-            <a:r>
-              <a:rPr lang="en-IN" baseline="30000" dirty="0">
-                <a:latin typeface="Times New Roman" panose="02020603050405020304" pitchFamily="18" charset="0"/>
-                <a:cs typeface="Times New Roman" panose="02020603050405020304" pitchFamily="18" charset="0"/>
-              </a:rPr>
-              <a:t>th </a:t>
-            </a:r>
-            <a:r>
-              <a:rPr lang="en-IN" dirty="0">
-                <a:latin typeface="Times New Roman" panose="02020603050405020304" pitchFamily="18" charset="0"/>
-                <a:cs typeface="Times New Roman" panose="02020603050405020304" pitchFamily="18" charset="0"/>
-              </a:rPr>
-              <a:t>Year 1</a:t>
-            </a:r>
-            <a:r>
-              <a:rPr lang="en-IN" baseline="30000" dirty="0">
-                <a:latin typeface="Times New Roman" panose="02020603050405020304" pitchFamily="18" charset="0"/>
-                <a:cs typeface="Times New Roman" panose="02020603050405020304" pitchFamily="18" charset="0"/>
-              </a:rPr>
-              <a:t>st</a:t>
-            </a:r>
-            <a:r>
-              <a:rPr lang="en-IN" dirty="0">
-                <a:latin typeface="Times New Roman" panose="02020603050405020304" pitchFamily="18" charset="0"/>
-                <a:cs typeface="Times New Roman" panose="02020603050405020304" pitchFamily="18" charset="0"/>
-              </a:rPr>
-              <a:t> Semester</a:t>
-            </a:r>
-            <a:endParaRPr lang="en-IN" baseline="30000" dirty="0">
-              <a:latin typeface="Times New Roman" panose="02020603050405020304" pitchFamily="18" charset="0"/>
-              <a:cs typeface="Times New Roman" panose="02020603050405020304" pitchFamily="18" charset="0"/>
-            </a:endParaRPr>
-          </a:p>
-        </p:txBody>
-      </p:sp>
-      <p:sp>
-        <p:nvSpPr>
-          <p:cNvPr id="8" name="Slide Number Placeholder 7">
-            <a:extLst>
-              <a:ext uri="{FF2B5EF4-FFF2-40B4-BE49-F238E27FC236}">
-                <a16:creationId xmlns:a16="http://schemas.microsoft.com/office/drawing/2014/main" id="{5D32FC86-3569-E178-C8E5-616537B10CBE}"/>
+                <a16:creationId xmlns:a16="http://schemas.microsoft.com/office/drawing/2014/main" id="{93A9F84C-B2D2-759D-D9A1-AC15E54ACC5E}"/>
               </a:ext>
             </a:extLst>
           </p:cNvPr>
@@ -4204,19 +3848,510 @@
           <a:p>
             <a:fld id="{C15910C1-11C6-4EDA-AB97-55AA77D27440}" type="slidenum">
               <a:rPr lang="en-IN" smtClean="0"/>
-              <a:pPr/>
               <a:t>1</a:t>
             </a:fld>
             <a:endParaRPr lang="en-IN"/>
+          </a:p>
+        </p:txBody>
+      </p:sp>
+      <p:pic>
+        <p:nvPicPr>
+          <p:cNvPr id="3" name="Picture 2">
+            <a:extLst>
+              <a:ext uri="{FF2B5EF4-FFF2-40B4-BE49-F238E27FC236}">
+                <a16:creationId xmlns:a16="http://schemas.microsoft.com/office/drawing/2014/main" id="{D8E3EFB7-9E41-993D-3E2A-2AC7BF54573D}"/>
+              </a:ext>
+            </a:extLst>
+          </p:cNvPr>
+          <p:cNvPicPr>
+            <a:picLocks noChangeAspect="1"/>
+          </p:cNvPicPr>
+          <p:nvPr/>
+        </p:nvPicPr>
+        <p:blipFill>
+          <a:blip r:embed="rId2">
+            <a:extLst>
+              <a:ext uri="{28A0092B-C50C-407E-A947-70E740481C1C}">
+                <a14:useLocalDpi xmlns:a14="http://schemas.microsoft.com/office/drawing/2010/main" val="0"/>
+              </a:ext>
+            </a:extLst>
+          </a:blip>
+          <a:srcRect/>
+          <a:stretch>
+            <a:fillRect/>
+          </a:stretch>
+        </p:blipFill>
+        <p:spPr bwMode="auto">
+          <a:xfrm>
+            <a:off x="366232" y="313184"/>
+            <a:ext cx="1273357" cy="1389117"/>
+          </a:xfrm>
+          <a:prstGeom prst="rect">
+            <a:avLst/>
+          </a:prstGeom>
+          <a:noFill/>
+          <a:ln>
+            <a:noFill/>
+          </a:ln>
+        </p:spPr>
+      </p:pic>
+      <p:sp>
+        <p:nvSpPr>
+          <p:cNvPr id="4" name="TextBox 3">
+            <a:extLst>
+              <a:ext uri="{FF2B5EF4-FFF2-40B4-BE49-F238E27FC236}">
+                <a16:creationId xmlns:a16="http://schemas.microsoft.com/office/drawing/2014/main" id="{25FB5612-150A-C898-6089-827F75FD97E5}"/>
+              </a:ext>
+            </a:extLst>
+          </p:cNvPr>
+          <p:cNvSpPr txBox="1"/>
+          <p:nvPr/>
+        </p:nvSpPr>
+        <p:spPr>
+          <a:xfrm>
+            <a:off x="1531620" y="448056"/>
+            <a:ext cx="9098280" cy="415498"/>
+          </a:xfrm>
+          <a:prstGeom prst="rect">
+            <a:avLst/>
+          </a:prstGeom>
+          <a:noFill/>
+        </p:spPr>
+        <p:txBody>
+          <a:bodyPr wrap="square">
+            <a:spAutoFit/>
+          </a:bodyPr>
+          <a:lstStyle/>
+          <a:p>
+            <a:pPr algn="ctr">
+              <a:defRPr sz="2100" b="1">
+                <a:solidFill>
+                  <a:srgbClr val="701826"/>
+                </a:solidFill>
+                <a:latin typeface="Times New Roman"/>
+              </a:defRPr>
+            </a:pPr>
+            <a:r>
+              <a:rPr dirty="0">
+                <a:latin typeface="Times New Roman" panose="02020603050405020304" pitchFamily="18" charset="0"/>
+                <a:cs typeface="Times New Roman" panose="02020603050405020304" pitchFamily="18" charset="0"/>
+              </a:rPr>
+              <a:t>Department of Computer Science And Engineering</a:t>
+            </a:r>
           </a:p>
         </p:txBody>
       </p:sp>
       <p:sp>
         <p:nvSpPr>
-          <p:cNvPr id="4" name="Rectangle 3">
+          <p:cNvPr id="5" name="TextBox 4">
             <a:extLst>
               <a:ext uri="{FF2B5EF4-FFF2-40B4-BE49-F238E27FC236}">
-                <a16:creationId xmlns:a16="http://schemas.microsoft.com/office/drawing/2014/main" id="{98A4DA43-34D3-63C0-BBA6-6126A0D3648E}"/>
+                <a16:creationId xmlns:a16="http://schemas.microsoft.com/office/drawing/2014/main" id="{67859D51-ACE0-3559-0101-C2D943029A2E}"/>
+              </a:ext>
+            </a:extLst>
+          </p:cNvPr>
+          <p:cNvSpPr txBox="1"/>
+          <p:nvPr/>
+        </p:nvSpPr>
+        <p:spPr>
+          <a:xfrm>
+            <a:off x="1417320" y="804672"/>
+            <a:ext cx="9372600" cy="329184"/>
+          </a:xfrm>
+          <a:prstGeom prst="rect">
+            <a:avLst/>
+          </a:prstGeom>
+          <a:noFill/>
+        </p:spPr>
+        <p:txBody>
+          <a:bodyPr wrap="square">
+            <a:spAutoFit/>
+          </a:bodyPr>
+          <a:lstStyle/>
+          <a:p>
+            <a:pPr algn="ctr">
+              <a:defRPr sz="1650" b="1">
+                <a:solidFill>
+                  <a:srgbClr val="142A56"/>
+                </a:solidFill>
+                <a:latin typeface="Times New Roman"/>
+              </a:defRPr>
+            </a:pPr>
+            <a:r>
+              <a:rPr dirty="0"/>
+              <a:t>UNIVERSITY COLLEGE OF ENGINEERING, SCIENCE AND TECHNOLOGY HYDERABAD</a:t>
+            </a:r>
+          </a:p>
+        </p:txBody>
+      </p:sp>
+      <p:sp>
+        <p:nvSpPr>
+          <p:cNvPr id="6" name="TextBox 5">
+            <a:extLst>
+              <a:ext uri="{FF2B5EF4-FFF2-40B4-BE49-F238E27FC236}">
+                <a16:creationId xmlns:a16="http://schemas.microsoft.com/office/drawing/2014/main" id="{76439AB4-A6D9-1DB0-6742-7291106F5A5F}"/>
+              </a:ext>
+            </a:extLst>
+          </p:cNvPr>
+          <p:cNvSpPr txBox="1"/>
+          <p:nvPr/>
+        </p:nvSpPr>
+        <p:spPr>
+          <a:xfrm>
+            <a:off x="1645920" y="1115568"/>
+            <a:ext cx="8961120" cy="310896"/>
+          </a:xfrm>
+          <a:prstGeom prst="rect">
+            <a:avLst/>
+          </a:prstGeom>
+          <a:noFill/>
+        </p:spPr>
+        <p:txBody>
+          <a:bodyPr wrap="square">
+            <a:spAutoFit/>
+          </a:bodyPr>
+          <a:lstStyle/>
+          <a:p>
+            <a:pPr algn="ctr">
+              <a:defRPr sz="1500" b="1">
+                <a:solidFill>
+                  <a:srgbClr val="1C1C1C"/>
+                </a:solidFill>
+                <a:latin typeface="Times New Roman"/>
+              </a:defRPr>
+            </a:pPr>
+            <a:r>
+              <a:rPr dirty="0"/>
+              <a:t>JAWAHARLAL NEHRU TECHNOLOGICAL UNIVERSITY HYDERABAD</a:t>
+            </a:r>
+          </a:p>
+        </p:txBody>
+      </p:sp>
+      <p:sp>
+        <p:nvSpPr>
+          <p:cNvPr id="7" name="TextBox 6">
+            <a:extLst>
+              <a:ext uri="{FF2B5EF4-FFF2-40B4-BE49-F238E27FC236}">
+                <a16:creationId xmlns:a16="http://schemas.microsoft.com/office/drawing/2014/main" id="{3E4BDFFD-D7BE-1C4F-3972-AAC96D97236C}"/>
+              </a:ext>
+            </a:extLst>
+          </p:cNvPr>
+          <p:cNvSpPr txBox="1"/>
+          <p:nvPr/>
+        </p:nvSpPr>
+        <p:spPr>
+          <a:xfrm>
+            <a:off x="2834640" y="1463040"/>
+            <a:ext cx="6583680" cy="276999"/>
+          </a:xfrm>
+          <a:prstGeom prst="rect">
+            <a:avLst/>
+          </a:prstGeom>
+          <a:noFill/>
+        </p:spPr>
+        <p:txBody>
+          <a:bodyPr wrap="square">
+            <a:spAutoFit/>
+          </a:bodyPr>
+          <a:lstStyle/>
+          <a:p>
+            <a:pPr algn="ctr">
+              <a:defRPr sz="950" b="0">
+                <a:solidFill>
+                  <a:srgbClr val="1C1C1C"/>
+                </a:solidFill>
+                <a:latin typeface="Times New Roman"/>
+              </a:defRPr>
+            </a:pPr>
+            <a:r>
+              <a:rPr sz="1200" dirty="0"/>
+              <a:t>Kukatpally, Hyderabad, Telangana (India) - 500 085.</a:t>
+            </a:r>
+          </a:p>
+        </p:txBody>
+      </p:sp>
+      <p:sp>
+        <p:nvSpPr>
+          <p:cNvPr id="8" name="TextBox 7">
+            <a:extLst>
+              <a:ext uri="{FF2B5EF4-FFF2-40B4-BE49-F238E27FC236}">
+                <a16:creationId xmlns:a16="http://schemas.microsoft.com/office/drawing/2014/main" id="{672AF892-7677-05A3-36FD-C9C8FD48AA85}"/>
+              </a:ext>
+            </a:extLst>
+          </p:cNvPr>
+          <p:cNvSpPr txBox="1"/>
+          <p:nvPr/>
+        </p:nvSpPr>
+        <p:spPr>
+          <a:xfrm>
+            <a:off x="3535992" y="2233508"/>
+            <a:ext cx="5089535" cy="461665"/>
+          </a:xfrm>
+          <a:prstGeom prst="rect">
+            <a:avLst/>
+          </a:prstGeom>
+          <a:noFill/>
+        </p:spPr>
+        <p:txBody>
+          <a:bodyPr wrap="none" rtlCol="0">
+            <a:spAutoFit/>
+          </a:bodyPr>
+          <a:lstStyle/>
+          <a:p>
+            <a:r>
+              <a:rPr lang="en-IN" sz="2400" b="1" dirty="0">
+                <a:latin typeface="Times New Roman" panose="02020603050405020304" pitchFamily="18" charset="0"/>
+                <a:cs typeface="Times New Roman" panose="02020603050405020304" pitchFamily="18" charset="0"/>
+              </a:rPr>
+              <a:t>DISSERTATION WORK REVIEW I</a:t>
+            </a:r>
+          </a:p>
+        </p:txBody>
+      </p:sp>
+      <p:sp>
+        <p:nvSpPr>
+          <p:cNvPr id="9" name="TextBox 8">
+            <a:extLst>
+              <a:ext uri="{FF2B5EF4-FFF2-40B4-BE49-F238E27FC236}">
+                <a16:creationId xmlns:a16="http://schemas.microsoft.com/office/drawing/2014/main" id="{1DB77E4D-CC14-251F-654E-0F0B81B57868}"/>
+              </a:ext>
+            </a:extLst>
+          </p:cNvPr>
+          <p:cNvSpPr txBox="1"/>
+          <p:nvPr/>
+        </p:nvSpPr>
+        <p:spPr>
+          <a:xfrm>
+            <a:off x="839455" y="2928553"/>
+            <a:ext cx="10482607" cy="1107996"/>
+          </a:xfrm>
+          <a:prstGeom prst="rect">
+            <a:avLst/>
+          </a:prstGeom>
+          <a:noFill/>
+        </p:spPr>
+        <p:txBody>
+          <a:bodyPr wrap="square" rtlCol="0">
+            <a:spAutoFit/>
+          </a:bodyPr>
+          <a:lstStyle/>
+          <a:p>
+            <a:pPr algn="ctr"/>
+            <a:r>
+              <a:rPr lang="en-US" sz="2200" b="1" dirty="0" err="1">
+                <a:latin typeface="Times New Roman" panose="02020603050405020304" pitchFamily="18" charset="0"/>
+                <a:cs typeface="Times New Roman" panose="02020603050405020304" pitchFamily="18" charset="0"/>
+              </a:rPr>
+              <a:t>Analysing</a:t>
+            </a:r>
+            <a:r>
+              <a:rPr lang="en-US" sz="2200" b="1" dirty="0">
+                <a:latin typeface="Times New Roman" panose="02020603050405020304" pitchFamily="18" charset="0"/>
+                <a:cs typeface="Times New Roman" panose="02020603050405020304" pitchFamily="18" charset="0"/>
+              </a:rPr>
+              <a:t> the Performance and Fairness of Machine Learning-based Depression Screening: Using NHANES Data Across the </a:t>
+            </a:r>
+          </a:p>
+          <a:p>
+            <a:pPr algn="ctr"/>
+            <a:r>
+              <a:rPr lang="en-US" sz="2200" b="1" dirty="0">
+                <a:latin typeface="Times New Roman" panose="02020603050405020304" pitchFamily="18" charset="0"/>
+                <a:cs typeface="Times New Roman" panose="02020603050405020304" pitchFamily="18" charset="0"/>
+              </a:rPr>
+              <a:t>COVID-19 Period </a:t>
+            </a:r>
+            <a:endParaRPr lang="en-US" sz="2200" dirty="0">
+              <a:latin typeface="Times New Roman" panose="02020603050405020304" pitchFamily="18" charset="0"/>
+              <a:cs typeface="Times New Roman" panose="02020603050405020304" pitchFamily="18" charset="0"/>
+            </a:endParaRPr>
+          </a:p>
+        </p:txBody>
+      </p:sp>
+      <p:sp>
+        <p:nvSpPr>
+          <p:cNvPr id="11" name="TextBox 10">
+            <a:extLst>
+              <a:ext uri="{FF2B5EF4-FFF2-40B4-BE49-F238E27FC236}">
+                <a16:creationId xmlns:a16="http://schemas.microsoft.com/office/drawing/2014/main" id="{7FB70A4B-8386-BA5C-518E-214BFAEDA53F}"/>
+              </a:ext>
+            </a:extLst>
+          </p:cNvPr>
+          <p:cNvSpPr txBox="1"/>
+          <p:nvPr/>
+        </p:nvSpPr>
+        <p:spPr>
+          <a:xfrm>
+            <a:off x="1077013" y="4938473"/>
+            <a:ext cx="4805313" cy="1384995"/>
+          </a:xfrm>
+          <a:prstGeom prst="rect">
+            <a:avLst/>
+          </a:prstGeom>
+          <a:noFill/>
+        </p:spPr>
+        <p:txBody>
+          <a:bodyPr wrap="square">
+            <a:spAutoFit/>
+          </a:bodyPr>
+          <a:lstStyle/>
+          <a:p>
+            <a:r>
+              <a:rPr lang="en-IN" u="sng" dirty="0">
+                <a:latin typeface="Times New Roman" panose="02020603050405020304" pitchFamily="18" charset="0"/>
+                <a:cs typeface="Times New Roman" panose="02020603050405020304" pitchFamily="18" charset="0"/>
+              </a:rPr>
+              <a:t>Presented by</a:t>
+            </a:r>
+            <a:r>
+              <a:rPr lang="en-IN" dirty="0">
+                <a:latin typeface="Times New Roman" panose="02020603050405020304" pitchFamily="18" charset="0"/>
+                <a:cs typeface="Times New Roman" panose="02020603050405020304" pitchFamily="18" charset="0"/>
+              </a:rPr>
+              <a:t>:</a:t>
+            </a:r>
+          </a:p>
+          <a:p>
+            <a:r>
+              <a:rPr lang="en-IN" dirty="0">
+                <a:latin typeface="Times New Roman" panose="02020603050405020304" pitchFamily="18" charset="0"/>
+                <a:cs typeface="Times New Roman" panose="02020603050405020304" pitchFamily="18" charset="0"/>
+              </a:rPr>
+              <a:t>Kurivella Greeshma (22011P0504)</a:t>
+            </a:r>
+          </a:p>
+          <a:p>
+            <a:r>
+              <a:rPr lang="en-IN" dirty="0">
+                <a:latin typeface="Times New Roman" panose="02020603050405020304" pitchFamily="18" charset="0"/>
+                <a:cs typeface="Times New Roman" panose="02020603050405020304" pitchFamily="18" charset="0"/>
+              </a:rPr>
+              <a:t>CSE IDP 5</a:t>
+            </a:r>
+            <a:r>
+              <a:rPr lang="en-IN" baseline="30000" dirty="0">
+                <a:latin typeface="Times New Roman" panose="02020603050405020304" pitchFamily="18" charset="0"/>
+                <a:cs typeface="Times New Roman" panose="02020603050405020304" pitchFamily="18" charset="0"/>
+              </a:rPr>
+              <a:t>th </a:t>
+            </a:r>
+            <a:r>
+              <a:rPr lang="en-IN" dirty="0">
+                <a:latin typeface="Times New Roman" panose="02020603050405020304" pitchFamily="18" charset="0"/>
+                <a:cs typeface="Times New Roman" panose="02020603050405020304" pitchFamily="18" charset="0"/>
+              </a:rPr>
+              <a:t>Year 1</a:t>
+            </a:r>
+            <a:r>
+              <a:rPr lang="en-IN" baseline="30000" dirty="0">
+                <a:latin typeface="Times New Roman" panose="02020603050405020304" pitchFamily="18" charset="0"/>
+                <a:cs typeface="Times New Roman" panose="02020603050405020304" pitchFamily="18" charset="0"/>
+              </a:rPr>
+              <a:t>st</a:t>
+            </a:r>
+            <a:r>
+              <a:rPr lang="en-IN" dirty="0">
+                <a:latin typeface="Times New Roman" panose="02020603050405020304" pitchFamily="18" charset="0"/>
+                <a:cs typeface="Times New Roman" panose="02020603050405020304" pitchFamily="18" charset="0"/>
+              </a:rPr>
+              <a:t> Semester</a:t>
+            </a:r>
+          </a:p>
+          <a:p>
+            <a:r>
+              <a:rPr lang="en-IN" dirty="0">
+                <a:latin typeface="Times New Roman" panose="02020603050405020304" pitchFamily="18" charset="0"/>
+                <a:cs typeface="Times New Roman" panose="02020603050405020304" pitchFamily="18" charset="0"/>
+              </a:rPr>
+              <a:t>JNTUH-UCESTH</a:t>
+            </a:r>
+          </a:p>
+          <a:p>
+            <a:endParaRPr lang="en-IN" baseline="30000" dirty="0">
+              <a:latin typeface="Times New Roman" panose="02020603050405020304" pitchFamily="18" charset="0"/>
+              <a:cs typeface="Times New Roman" panose="02020603050405020304" pitchFamily="18" charset="0"/>
+            </a:endParaRPr>
+          </a:p>
+        </p:txBody>
+      </p:sp>
+      <p:sp>
+        <p:nvSpPr>
+          <p:cNvPr id="13" name="TextBox 12">
+            <a:extLst>
+              <a:ext uri="{FF2B5EF4-FFF2-40B4-BE49-F238E27FC236}">
+                <a16:creationId xmlns:a16="http://schemas.microsoft.com/office/drawing/2014/main" id="{868574A9-FD96-06AB-7A7B-6AB2F09231F9}"/>
+              </a:ext>
+            </a:extLst>
+          </p:cNvPr>
+          <p:cNvSpPr txBox="1"/>
+          <p:nvPr/>
+        </p:nvSpPr>
+        <p:spPr>
+          <a:xfrm>
+            <a:off x="7063033" y="4938473"/>
+            <a:ext cx="6094428" cy="1200329"/>
+          </a:xfrm>
+          <a:prstGeom prst="rect">
+            <a:avLst/>
+          </a:prstGeom>
+          <a:noFill/>
+        </p:spPr>
+        <p:txBody>
+          <a:bodyPr wrap="square">
+            <a:spAutoFit/>
+          </a:bodyPr>
+          <a:lstStyle/>
+          <a:p>
+            <a:r>
+              <a:rPr lang="en-IN" u="sng" dirty="0">
+                <a:latin typeface="Times New Roman" panose="02020603050405020304" pitchFamily="18" charset="0"/>
+                <a:cs typeface="Times New Roman" panose="02020603050405020304" pitchFamily="18" charset="0"/>
+              </a:rPr>
+              <a:t>Guide</a:t>
+            </a:r>
+            <a:r>
+              <a:rPr lang="en-IN" dirty="0">
+                <a:latin typeface="Times New Roman" panose="02020603050405020304" pitchFamily="18" charset="0"/>
+                <a:cs typeface="Times New Roman" panose="02020603050405020304" pitchFamily="18" charset="0"/>
+              </a:rPr>
+              <a:t>:</a:t>
+            </a:r>
+          </a:p>
+          <a:p>
+            <a:r>
+              <a:rPr lang="en-IN" dirty="0">
+                <a:latin typeface="Times New Roman" panose="02020603050405020304" pitchFamily="18" charset="0"/>
+                <a:cs typeface="Times New Roman" panose="02020603050405020304" pitchFamily="18" charset="0"/>
+              </a:rPr>
+              <a:t>Dr. B. Kranthi Kiran</a:t>
+            </a:r>
+          </a:p>
+          <a:p>
+            <a:r>
+              <a:rPr lang="en-IN" dirty="0">
+                <a:latin typeface="Times New Roman" panose="02020603050405020304" pitchFamily="18" charset="0"/>
+                <a:cs typeface="Times New Roman" panose="02020603050405020304" pitchFamily="18" charset="0"/>
+              </a:rPr>
+              <a:t>Professor &amp; Coordinator – SC/ST Cell</a:t>
+            </a:r>
+          </a:p>
+          <a:p>
+            <a:r>
+              <a:rPr lang="en-IN" dirty="0">
+                <a:latin typeface="Times New Roman" panose="02020603050405020304" pitchFamily="18" charset="0"/>
+                <a:cs typeface="Times New Roman" panose="02020603050405020304" pitchFamily="18" charset="0"/>
+              </a:rPr>
+              <a:t>JNTUH-UCESTH</a:t>
+            </a:r>
+          </a:p>
+        </p:txBody>
+      </p:sp>
+      <p:sp>
+        <p:nvSpPr>
+          <p:cNvPr id="14" name="Rectangle 13">
+            <a:extLst>
+              <a:ext uri="{FF2B5EF4-FFF2-40B4-BE49-F238E27FC236}">
+                <a16:creationId xmlns:a16="http://schemas.microsoft.com/office/drawing/2014/main" id="{9CE60DAE-2D3D-8589-6FCA-F5A7F4E3B71D}"/>
               </a:ext>
             </a:extLst>
           </p:cNvPr>
@@ -4266,7 +4401,7 @@
     </p:spTree>
     <p:extLst>
       <p:ext uri="{BB962C8B-B14F-4D97-AF65-F5344CB8AC3E}">
-        <p14:creationId xmlns:p14="http://schemas.microsoft.com/office/powerpoint/2010/main" val="331328494"/>
+        <p14:creationId xmlns:p14="http://schemas.microsoft.com/office/powerpoint/2010/main" val="1938346824"/>
       </p:ext>
     </p:extLst>
   </p:cSld>
@@ -5088,8 +5223,8 @@
           </a:p>
         </p:txBody>
       </p:sp>
-      <mc:AlternateContent xmlns:mc="http://schemas.openxmlformats.org/markup-compatibility/2006">
-        <mc:Choice xmlns:a14="http://schemas.microsoft.com/office/drawing/2010/main" Requires="a14">
+      <mc:AlternateContent xmlns:mc="http://schemas.openxmlformats.org/markup-compatibility/2006" xmlns:a14="http://schemas.microsoft.com/office/drawing/2010/main">
+        <mc:Choice Requires="a14">
           <p:graphicFrame>
             <p:nvGraphicFramePr>
               <p:cNvPr id="7" name="Content Placeholder 6">
@@ -5348,73 +5483,99 @@
                               </m:oMathParaPr>
                               <m:oMath xmlns:m="http://schemas.openxmlformats.org/officeDocument/2006/math">
                                 <m:r>
-                                  <a:rPr lang="ar-AE" sz="1400"/>
+                                  <a:rPr lang="ar-AE" sz="1400">
+                                    <a:latin typeface="Cambria Math" panose="02040503050406030204" pitchFamily="18" charset="0"/>
+                                  </a:rPr>
                                   <m:t>𝐴𝑈𝑅𝑂𝐶</m:t>
                                 </m:r>
                                 <m:r>
-                                  <a:rPr lang="ar-AE" sz="1400"/>
+                                  <a:rPr lang="ar-AE" sz="1400">
+                                    <a:latin typeface="Cambria Math" panose="02040503050406030204" pitchFamily="18" charset="0"/>
+                                  </a:rPr>
                                   <m:t>=</m:t>
                                 </m:r>
                                 <m:nary>
                                   <m:naryPr>
                                     <m:grow m:val="on"/>
                                     <m:ctrlPr>
-                                      <a:rPr lang="ar-AE" sz="1400"/>
+                                      <a:rPr lang="ar-AE" sz="1400" i="1">
+                                        <a:latin typeface="Cambria Math" panose="02040503050406030204" pitchFamily="18" charset="0"/>
+                                      </a:rPr>
                                     </m:ctrlPr>
                                   </m:naryPr>
                                   <m:sub>
                                     <m:r>
-                                      <a:rPr lang="ar-AE" sz="1400"/>
+                                      <a:rPr lang="ar-AE" sz="1400">
+                                        <a:latin typeface="Cambria Math" panose="02040503050406030204" pitchFamily="18" charset="0"/>
+                                      </a:rPr>
                                       <m:t>0</m:t>
                                     </m:r>
                                   </m:sub>
                                   <m:sup>
                                     <m:r>
-                                      <a:rPr lang="ar-AE" sz="1400"/>
+                                      <a:rPr lang="ar-AE" sz="1400">
+                                        <a:latin typeface="Cambria Math" panose="02040503050406030204" pitchFamily="18" charset="0"/>
+                                      </a:rPr>
                                       <m:t>1</m:t>
                                     </m:r>
                                   </m:sup>
                                   <m:e>
                                     <m:r>
-                                      <a:rPr lang="ar-AE" sz="1400"/>
+                                      <a:rPr lang="ar-AE" sz="1400">
+                                        <a:latin typeface="Cambria Math" panose="02040503050406030204" pitchFamily="18" charset="0"/>
+                                      </a:rPr>
                                       <m:t>𝑇</m:t>
                                     </m:r>
                                   </m:e>
                                 </m:nary>
                                 <m:r>
-                                  <a:rPr lang="ar-AE" sz="1400"/>
+                                  <a:rPr lang="ar-AE" sz="1400">
+                                    <a:latin typeface="Cambria Math" panose="02040503050406030204" pitchFamily="18" charset="0"/>
+                                  </a:rPr>
                                   <m:t>𝑃𝑅</m:t>
                                 </m:r>
                                 <m:d>
                                   <m:dPr>
                                     <m:ctrlPr>
-                                      <a:rPr lang="ar-AE" sz="1400"/>
+                                      <a:rPr lang="ar-AE" sz="1400" i="1">
+                                        <a:latin typeface="Cambria Math" panose="02040503050406030204" pitchFamily="18" charset="0"/>
+                                      </a:rPr>
                                     </m:ctrlPr>
                                   </m:dPr>
                                   <m:e>
                                     <m:r>
-                                      <a:rPr lang="ar-AE" sz="1400"/>
+                                      <a:rPr lang="ar-AE" sz="1400">
+                                        <a:latin typeface="Cambria Math" panose="02040503050406030204" pitchFamily="18" charset="0"/>
+                                      </a:rPr>
                                       <m:t>𝐹𝑃</m:t>
                                     </m:r>
                                     <m:sSup>
                                       <m:sSupPr>
                                         <m:ctrlPr>
-                                          <a:rPr lang="ar-AE" sz="1400"/>
+                                          <a:rPr lang="ar-AE" sz="1400" i="1">
+                                            <a:latin typeface="Cambria Math" panose="02040503050406030204" pitchFamily="18" charset="0"/>
+                                          </a:rPr>
                                         </m:ctrlPr>
                                       </m:sSupPr>
                                       <m:e>
                                         <m:r>
-                                          <a:rPr lang="ar-AE" sz="1400"/>
+                                          <a:rPr lang="ar-AE" sz="1400">
+                                            <a:latin typeface="Cambria Math" panose="02040503050406030204" pitchFamily="18" charset="0"/>
+                                          </a:rPr>
                                           <m:t>𝑅</m:t>
                                         </m:r>
                                       </m:e>
                                       <m:sup>
                                         <m:r>
-                                          <a:rPr lang="ar-AE" sz="1400"/>
+                                          <a:rPr lang="ar-AE" sz="1400">
+                                            <a:latin typeface="Cambria Math" panose="02040503050406030204" pitchFamily="18" charset="0"/>
+                                          </a:rPr>
                                           <m:t>−</m:t>
                                         </m:r>
                                         <m:r>
-                                          <a:rPr lang="ar-AE" sz="1400"/>
+                                          <a:rPr lang="ar-AE" sz="1400">
+                                            <a:latin typeface="Cambria Math" panose="02040503050406030204" pitchFamily="18" charset="0"/>
+                                          </a:rPr>
                                           <m:t>1</m:t>
                                         </m:r>
                                       </m:sup>
@@ -5422,12 +5583,16 @@
                                     <m:d>
                                       <m:dPr>
                                         <m:ctrlPr>
-                                          <a:rPr lang="ar-AE" sz="1400"/>
+                                          <a:rPr lang="ar-AE" sz="1400" i="1">
+                                            <a:latin typeface="Cambria Math" panose="02040503050406030204" pitchFamily="18" charset="0"/>
+                                          </a:rPr>
                                         </m:ctrlPr>
                                       </m:dPr>
                                       <m:e>
                                         <m:r>
-                                          <a:rPr lang="ar-AE" sz="1400"/>
+                                          <a:rPr lang="ar-AE" sz="1400">
+                                            <a:latin typeface="Cambria Math" panose="02040503050406030204" pitchFamily="18" charset="0"/>
+                                          </a:rPr>
                                           <m:t>𝑥</m:t>
                                         </m:r>
                                       </m:e>
@@ -5445,7 +5610,9 @@
                                   <m:t> </m:t>
                                 </m:r>
                                 <m:r>
-                                  <a:rPr lang="ar-AE" sz="1400" b="0"/>
+                                  <a:rPr lang="ar-AE" sz="1400" b="0">
+                                    <a:latin typeface="Cambria Math" panose="02040503050406030204" pitchFamily="18" charset="0"/>
+                                  </a:rPr>
                                   <m:t>𝑑𝑥</m:t>
                                 </m:r>
                               </m:oMath>
@@ -5577,52 +5744,74 @@
                               </m:oMathParaPr>
                               <m:oMath xmlns:m="http://schemas.openxmlformats.org/officeDocument/2006/math">
                                 <m:r>
-                                  <a:rPr lang="ar-AE" sz="1400"/>
+                                  <a:rPr lang="ar-AE" sz="1400">
+                                    <a:latin typeface="Cambria Math" panose="02040503050406030204" pitchFamily="18" charset="0"/>
+                                  </a:rPr>
                                   <m:t>𝐹</m:t>
                                 </m:r>
                                 <m:r>
-                                  <a:rPr lang="ar-AE" sz="1400"/>
+                                  <a:rPr lang="ar-AE" sz="1400">
+                                    <a:latin typeface="Cambria Math" panose="02040503050406030204" pitchFamily="18" charset="0"/>
+                                  </a:rPr>
                                   <m:t>1</m:t>
                                 </m:r>
                                 <m:r>
-                                  <a:rPr lang="ar-AE" sz="1400"/>
+                                  <a:rPr lang="ar-AE" sz="1400">
+                                    <a:latin typeface="Cambria Math" panose="02040503050406030204" pitchFamily="18" charset="0"/>
+                                  </a:rPr>
                                   <m:t>=</m:t>
                                 </m:r>
                                 <m:r>
-                                  <a:rPr lang="ar-AE" sz="1400"/>
+                                  <a:rPr lang="ar-AE" sz="1400">
+                                    <a:latin typeface="Cambria Math" panose="02040503050406030204" pitchFamily="18" charset="0"/>
+                                  </a:rPr>
                                   <m:t>2</m:t>
                                 </m:r>
                                 <m:f>
                                   <m:fPr>
                                     <m:ctrlPr>
-                                      <a:rPr lang="ar-AE" sz="1400"/>
+                                      <a:rPr lang="ar-AE" sz="1400" i="1">
+                                        <a:latin typeface="Cambria Math" panose="02040503050406030204" pitchFamily="18" charset="0"/>
+                                      </a:rPr>
                                     </m:ctrlPr>
                                   </m:fPr>
                                   <m:num>
                                     <m:r>
-                                      <a:rPr lang="ar-AE" sz="1400"/>
+                                      <a:rPr lang="ar-AE" sz="1400">
+                                        <a:latin typeface="Cambria Math" panose="02040503050406030204" pitchFamily="18" charset="0"/>
+                                      </a:rPr>
                                       <m:t>𝑃𝑟𝑒𝑐𝑖𝑠𝑖𝑜𝑛</m:t>
                                     </m:r>
                                     <m:r>
-                                      <a:rPr lang="ar-AE" sz="1400"/>
+                                      <a:rPr lang="ar-AE" sz="1400">
+                                        <a:latin typeface="Cambria Math" panose="02040503050406030204" pitchFamily="18" charset="0"/>
+                                      </a:rPr>
                                       <m:t>×</m:t>
                                     </m:r>
                                     <m:r>
-                                      <a:rPr lang="ar-AE" sz="1400"/>
+                                      <a:rPr lang="ar-AE" sz="1400">
+                                        <a:latin typeface="Cambria Math" panose="02040503050406030204" pitchFamily="18" charset="0"/>
+                                      </a:rPr>
                                       <m:t>𝑅𝑒𝑐𝑎𝑙𝑙</m:t>
                                     </m:r>
                                   </m:num>
                                   <m:den>
                                     <m:r>
-                                      <a:rPr lang="ar-AE" sz="1400"/>
+                                      <a:rPr lang="ar-AE" sz="1400">
+                                        <a:latin typeface="Cambria Math" panose="02040503050406030204" pitchFamily="18" charset="0"/>
+                                      </a:rPr>
                                       <m:t>𝑃𝑟𝑒𝑐𝑖𝑠𝑖𝑜𝑛</m:t>
                                     </m:r>
                                     <m:r>
-                                      <a:rPr lang="ar-AE" sz="1400"/>
+                                      <a:rPr lang="ar-AE" sz="1400">
+                                        <a:latin typeface="Cambria Math" panose="02040503050406030204" pitchFamily="18" charset="0"/>
+                                      </a:rPr>
                                       <m:t>+</m:t>
                                     </m:r>
                                     <m:r>
-                                      <a:rPr lang="ar-AE" sz="1400"/>
+                                      <a:rPr lang="ar-AE" sz="1400">
+                                        <a:latin typeface="Cambria Math" panose="02040503050406030204" pitchFamily="18" charset="0"/>
+                                      </a:rPr>
                                       <m:t>𝑅𝑒𝑐𝑎𝑙𝑙</m:t>
                                     </m:r>
                                   </m:den>
@@ -5756,36 +5945,50 @@
                               </m:oMathParaPr>
                               <m:oMath xmlns:m="http://schemas.openxmlformats.org/officeDocument/2006/math">
                                 <m:r>
-                                  <a:rPr lang="ar-AE" sz="1400"/>
+                                  <a:rPr lang="ar-AE" sz="1400">
+                                    <a:latin typeface="Cambria Math" panose="02040503050406030204" pitchFamily="18" charset="0"/>
+                                  </a:rPr>
                                   <m:t>𝑆𝑒𝑛𝑠𝑖𝑡𝑖𝑣𝑖𝑡𝑦</m:t>
                                 </m:r>
                                 <m:r>
-                                  <a:rPr lang="ar-AE" sz="1400"/>
+                                  <a:rPr lang="ar-AE" sz="1400">
+                                    <a:latin typeface="Cambria Math" panose="02040503050406030204" pitchFamily="18" charset="0"/>
+                                  </a:rPr>
                                   <m:t>=</m:t>
                                 </m:r>
                                 <m:f>
                                   <m:fPr>
                                     <m:ctrlPr>
-                                      <a:rPr lang="ar-AE" sz="1400"/>
+                                      <a:rPr lang="ar-AE" sz="1400" i="1">
+                                        <a:latin typeface="Cambria Math" panose="02040503050406030204" pitchFamily="18" charset="0"/>
+                                      </a:rPr>
                                     </m:ctrlPr>
                                   </m:fPr>
                                   <m:num>
                                     <m:r>
-                                      <a:rPr lang="ar-AE" sz="1400"/>
+                                      <a:rPr lang="ar-AE" sz="1400">
+                                        <a:latin typeface="Cambria Math" panose="02040503050406030204" pitchFamily="18" charset="0"/>
+                                      </a:rPr>
                                       <m:t>𝑇𝑃</m:t>
                                     </m:r>
                                   </m:num>
                                   <m:den>
                                     <m:r>
-                                      <a:rPr lang="ar-AE" sz="1400"/>
+                                      <a:rPr lang="ar-AE" sz="1400">
+                                        <a:latin typeface="Cambria Math" panose="02040503050406030204" pitchFamily="18" charset="0"/>
+                                      </a:rPr>
                                       <m:t>𝑇𝑃</m:t>
                                     </m:r>
                                     <m:r>
-                                      <a:rPr lang="ar-AE" sz="1400"/>
+                                      <a:rPr lang="ar-AE" sz="1400">
+                                        <a:latin typeface="Cambria Math" panose="02040503050406030204" pitchFamily="18" charset="0"/>
+                                      </a:rPr>
                                       <m:t>+</m:t>
                                     </m:r>
                                     <m:r>
-                                      <a:rPr lang="ar-AE" sz="1400"/>
+                                      <a:rPr lang="ar-AE" sz="1400">
+                                        <a:latin typeface="Cambria Math" panose="02040503050406030204" pitchFamily="18" charset="0"/>
+                                      </a:rPr>
                                       <m:t>𝐹𝑁</m:t>
                                     </m:r>
                                   </m:den>
@@ -5905,70 +6108,98 @@
                               </m:oMathParaPr>
                               <m:oMath xmlns:m="http://schemas.openxmlformats.org/officeDocument/2006/math">
                                 <m:r>
-                                  <a:rPr lang="ar-AE" sz="1400"/>
+                                  <a:rPr lang="ar-AE" sz="1400">
+                                    <a:latin typeface="Cambria Math" panose="02040503050406030204" pitchFamily="18" charset="0"/>
+                                  </a:rPr>
                                   <m:t>𝐶𝑎𝑙𝑖𝑏𝑟𝑎𝑡𝑖𝑜𝑛</m:t>
                                 </m:r>
                                 <m:r>
-                                  <a:rPr lang="ar-AE" sz="1400"/>
+                                  <a:rPr lang="ar-AE" sz="1400">
+                                    <a:latin typeface="Cambria Math" panose="02040503050406030204" pitchFamily="18" charset="0"/>
+                                  </a:rPr>
                                   <m:t>≈</m:t>
                                 </m:r>
                                 <m:r>
-                                  <a:rPr lang="ar-AE" sz="1400"/>
+                                  <a:rPr lang="ar-AE" sz="1400">
+                                    <a:latin typeface="Cambria Math" panose="02040503050406030204" pitchFamily="18" charset="0"/>
+                                  </a:rPr>
                                   <m:t>𝑃</m:t>
                                 </m:r>
                                 <m:d>
                                   <m:dPr>
                                     <m:ctrlPr>
-                                      <a:rPr lang="ar-AE" sz="1400"/>
+                                      <a:rPr lang="ar-AE" sz="1400" i="1">
+                                        <a:latin typeface="Cambria Math" panose="02040503050406030204" pitchFamily="18" charset="0"/>
+                                      </a:rPr>
                                     </m:ctrlPr>
                                   </m:dPr>
                                   <m:e>
                                     <m:r>
-                                      <a:rPr lang="ar-AE" sz="1400"/>
+                                      <a:rPr lang="ar-AE" sz="1400">
+                                        <a:latin typeface="Cambria Math" panose="02040503050406030204" pitchFamily="18" charset="0"/>
+                                      </a:rPr>
                                       <m:t>𝑌</m:t>
                                     </m:r>
                                     <m:r>
-                                      <a:rPr lang="ar-AE" sz="1400"/>
+                                      <a:rPr lang="ar-AE" sz="1400">
+                                        <a:latin typeface="Cambria Math" panose="02040503050406030204" pitchFamily="18" charset="0"/>
+                                      </a:rPr>
                                       <m:t>=</m:t>
                                     </m:r>
                                     <m:r>
-                                      <a:rPr lang="ar-AE" sz="1400"/>
+                                      <a:rPr lang="ar-AE" sz="1400">
+                                        <a:latin typeface="Cambria Math" panose="02040503050406030204" pitchFamily="18" charset="0"/>
+                                      </a:rPr>
                                       <m:t>1</m:t>
                                     </m:r>
                                     <m:r>
-                                      <a:rPr lang="ar-AE" sz="1400"/>
+                                      <a:rPr lang="ar-AE" sz="1400">
+                                        <a:latin typeface="Cambria Math" panose="02040503050406030204" pitchFamily="18" charset="0"/>
+                                      </a:rPr>
                                       <m:t>∣</m:t>
                                     </m:r>
                                     <m:acc>
                                       <m:accPr>
                                         <m:chr m:val="̂"/>
                                         <m:ctrlPr>
-                                          <a:rPr lang="ar-AE" sz="1400"/>
+                                          <a:rPr lang="ar-AE" sz="1400" i="1">
+                                            <a:latin typeface="Cambria Math" panose="02040503050406030204" pitchFamily="18" charset="0"/>
+                                          </a:rPr>
                                         </m:ctrlPr>
                                       </m:accPr>
                                       <m:e>
                                         <m:r>
-                                          <a:rPr lang="ar-AE" sz="1400"/>
+                                          <a:rPr lang="ar-AE" sz="1400">
+                                            <a:latin typeface="Cambria Math" panose="02040503050406030204" pitchFamily="18" charset="0"/>
+                                          </a:rPr>
                                           <m:t>𝑃</m:t>
                                         </m:r>
                                       </m:e>
                                     </m:acc>
                                     <m:r>
-                                      <a:rPr lang="ar-AE" sz="1400"/>
+                                      <a:rPr lang="ar-AE" sz="1400">
+                                        <a:latin typeface="Cambria Math" panose="02040503050406030204" pitchFamily="18" charset="0"/>
+                                      </a:rPr>
                                       <m:t>=</m:t>
                                     </m:r>
                                     <m:r>
-                                      <a:rPr lang="ar-AE" sz="1400"/>
+                                      <a:rPr lang="ar-AE" sz="1400">
+                                        <a:latin typeface="Cambria Math" panose="02040503050406030204" pitchFamily="18" charset="0"/>
+                                      </a:rPr>
                                       <m:t>𝑝</m:t>
                                     </m:r>
                                   </m:e>
                                 </m:d>
                                 <m:r>
-                                  <a:rPr lang="ar-AE" sz="1400"/>
+                                  <a:rPr lang="ar-AE" sz="1400">
+                                    <a:latin typeface="Cambria Math" panose="02040503050406030204" pitchFamily="18" charset="0"/>
+                                  </a:rPr>
                                   <m:t>≈</m:t>
                                 </m:r>
                                 <m:r>
-                                  <a:rPr lang="ar-AE" sz="1400"/>
+                                  <a:rPr lang="ar-AE" sz="1400">
+                                    <a:latin typeface="Cambria Math" panose="02040503050406030204" pitchFamily="18" charset="0"/>
+                                  </a:rPr>
                                   <m:t>𝑝</m:t>
                                 </m:r>
                               </m:oMath>
@@ -6107,32 +6338,42 @@
                               </m:oMathParaPr>
                               <m:oMath xmlns:m="http://schemas.openxmlformats.org/officeDocument/2006/math">
                                 <m:r>
-                                  <a:rPr lang="ar-AE" sz="1400"/>
+                                  <a:rPr lang="ar-AE" sz="1400">
+                                    <a:latin typeface="Cambria Math" panose="02040503050406030204" pitchFamily="18" charset="0"/>
+                                  </a:rPr>
                                   <m:t>𝐷</m:t>
                                 </m:r>
                                 <m:d>
                                   <m:dPr>
                                     <m:sepChr m:val=","/>
                                     <m:ctrlPr>
-                                      <a:rPr lang="ar-AE" sz="1400"/>
+                                      <a:rPr lang="ar-AE" sz="1400" i="1">
+                                        <a:latin typeface="Cambria Math" panose="02040503050406030204" pitchFamily="18" charset="0"/>
+                                      </a:rPr>
                                     </m:ctrlPr>
                                   </m:dPr>
                                   <m:e>
                                     <m:sSub>
                                       <m:sSubPr>
                                         <m:ctrlPr>
-                                          <a:rPr lang="ar-AE" sz="1400"/>
+                                          <a:rPr lang="ar-AE" sz="1400" i="1">
+                                            <a:latin typeface="Cambria Math" panose="02040503050406030204" pitchFamily="18" charset="0"/>
+                                          </a:rPr>
                                         </m:ctrlPr>
                                       </m:sSubPr>
                                       <m:e>
                                         <m:r>
-                                          <a:rPr lang="ar-AE" sz="1400"/>
+                                          <a:rPr lang="ar-AE" sz="1400">
+                                            <a:latin typeface="Cambria Math" panose="02040503050406030204" pitchFamily="18" charset="0"/>
+                                          </a:rPr>
                                           <m:t>𝑃</m:t>
                                         </m:r>
                                       </m:e>
                                       <m:sub>
                                         <m:r>
-                                          <a:rPr lang="ar-AE" sz="1400"/>
+                                          <a:rPr lang="ar-AE" sz="1400">
+                                            <a:latin typeface="Cambria Math" panose="02040503050406030204" pitchFamily="18" charset="0"/>
+                                          </a:rPr>
                                           <m:t>𝑝𝑟𝑒</m:t>
                                         </m:r>
                                       </m:sub>
@@ -6142,12 +6383,16 @@
                                     <m:d>
                                       <m:dPr>
                                         <m:ctrlPr>
-                                          <a:rPr lang="ar-AE" sz="1400"/>
+                                          <a:rPr lang="ar-AE" sz="1400" i="1">
+                                            <a:latin typeface="Cambria Math" panose="02040503050406030204" pitchFamily="18" charset="0"/>
+                                          </a:rPr>
                                         </m:ctrlPr>
                                       </m:dPr>
                                       <m:e>
                                         <m:r>
-                                          <a:rPr lang="ar-AE" sz="1400"/>
+                                          <a:rPr lang="ar-AE" sz="1400">
+                                            <a:latin typeface="Cambria Math" panose="02040503050406030204" pitchFamily="18" charset="0"/>
+                                          </a:rPr>
                                           <m:t>𝑋</m:t>
                                         </m:r>
                                       </m:e>
@@ -6155,18 +6400,24 @@
                                     <m:sSub>
                                       <m:sSubPr>
                                         <m:ctrlPr>
-                                          <a:rPr lang="ar-AE" sz="1400"/>
+                                          <a:rPr lang="ar-AE" sz="1400" i="1">
+                                            <a:latin typeface="Cambria Math" panose="02040503050406030204" pitchFamily="18" charset="0"/>
+                                          </a:rPr>
                                         </m:ctrlPr>
                                       </m:sSubPr>
                                       <m:e>
                                         <m:r>
-                                          <a:rPr lang="ar-AE" sz="1400"/>
+                                          <a:rPr lang="ar-AE" sz="1400">
+                                            <a:latin typeface="Cambria Math" panose="02040503050406030204" pitchFamily="18" charset="0"/>
+                                          </a:rPr>
                                           <m:t>𝑃</m:t>
                                         </m:r>
                                       </m:e>
                                       <m:sub>
                                         <m:r>
-                                          <a:rPr lang="ar-AE" sz="1400"/>
+                                          <a:rPr lang="ar-AE" sz="1400">
+                                            <a:latin typeface="Cambria Math" panose="02040503050406030204" pitchFamily="18" charset="0"/>
+                                          </a:rPr>
                                           <m:t>𝑝𝑜𝑠𝑡</m:t>
                                         </m:r>
                                       </m:sub>
@@ -6174,12 +6425,16 @@
                                     <m:d>
                                       <m:dPr>
                                         <m:ctrlPr>
-                                          <a:rPr lang="ar-AE" sz="1400"/>
+                                          <a:rPr lang="ar-AE" sz="1400" i="1">
+                                            <a:latin typeface="Cambria Math" panose="02040503050406030204" pitchFamily="18" charset="0"/>
+                                          </a:rPr>
                                         </m:ctrlPr>
                                       </m:dPr>
                                       <m:e>
                                         <m:r>
-                                          <a:rPr lang="ar-AE" sz="1400"/>
+                                          <a:rPr lang="ar-AE" sz="1400">
+                                            <a:latin typeface="Cambria Math" panose="02040503050406030204" pitchFamily="18" charset="0"/>
+                                          </a:rPr>
                                           <m:t>𝑋</m:t>
                                         </m:r>
                                       </m:e>
@@ -6322,58 +6577,78 @@
                               </m:oMathParaPr>
                               <m:oMath xmlns:m="http://schemas.openxmlformats.org/officeDocument/2006/math">
                                 <m:r>
-                                  <a:rPr lang="ar-AE" sz="1400"/>
+                                  <a:rPr lang="ar-AE" sz="1400">
+                                    <a:latin typeface="Cambria Math" panose="02040503050406030204" pitchFamily="18" charset="0"/>
+                                  </a:rPr>
                                   <m:t>𝑇𝑃</m:t>
                                 </m:r>
                                 <m:sSub>
                                   <m:sSubPr>
                                     <m:ctrlPr>
-                                      <a:rPr lang="ar-AE" sz="1400"/>
+                                      <a:rPr lang="ar-AE" sz="1400" i="1">
+                                        <a:latin typeface="Cambria Math" panose="02040503050406030204" pitchFamily="18" charset="0"/>
+                                      </a:rPr>
                                     </m:ctrlPr>
                                   </m:sSubPr>
                                   <m:e>
                                     <m:r>
-                                      <a:rPr lang="ar-AE" sz="1400"/>
+                                      <a:rPr lang="ar-AE" sz="1400">
+                                        <a:latin typeface="Cambria Math" panose="02040503050406030204" pitchFamily="18" charset="0"/>
+                                      </a:rPr>
                                       <m:t>𝑅</m:t>
                                     </m:r>
                                   </m:e>
                                   <m:sub>
                                     <m:r>
-                                      <a:rPr lang="ar-AE" sz="1400"/>
+                                      <a:rPr lang="ar-AE" sz="1400">
+                                        <a:latin typeface="Cambria Math" panose="02040503050406030204" pitchFamily="18" charset="0"/>
+                                      </a:rPr>
                                       <m:t>𝑔</m:t>
                                     </m:r>
                                   </m:sub>
                                 </m:sSub>
                                 <m:r>
-                                  <a:rPr lang="ar-AE" sz="1400"/>
+                                  <a:rPr lang="ar-AE" sz="1400">
+                                    <a:latin typeface="Cambria Math" panose="02040503050406030204" pitchFamily="18" charset="0"/>
+                                  </a:rPr>
                                   <m:t>=</m:t>
                                 </m:r>
                                 <m:f>
                                   <m:fPr>
                                     <m:ctrlPr>
-                                      <a:rPr lang="ar-AE" sz="1400"/>
+                                      <a:rPr lang="ar-AE" sz="1400" i="1">
+                                        <a:latin typeface="Cambria Math" panose="02040503050406030204" pitchFamily="18" charset="0"/>
+                                      </a:rPr>
                                     </m:ctrlPr>
                                   </m:fPr>
                                   <m:num>
                                     <m:r>
-                                      <a:rPr lang="ar-AE" sz="1400"/>
+                                      <a:rPr lang="ar-AE" sz="1400">
+                                        <a:latin typeface="Cambria Math" panose="02040503050406030204" pitchFamily="18" charset="0"/>
+                                      </a:rPr>
                                       <m:t>𝑇</m:t>
                                     </m:r>
                                     <m:sSub>
                                       <m:sSubPr>
                                         <m:ctrlPr>
-                                          <a:rPr lang="ar-AE" sz="1400"/>
+                                          <a:rPr lang="ar-AE" sz="1400" i="1">
+                                            <a:latin typeface="Cambria Math" panose="02040503050406030204" pitchFamily="18" charset="0"/>
+                                          </a:rPr>
                                         </m:ctrlPr>
                                       </m:sSubPr>
                                       <m:e>
                                         <m:r>
-                                          <a:rPr lang="ar-AE" sz="1400"/>
+                                          <a:rPr lang="ar-AE" sz="1400">
+                                            <a:latin typeface="Cambria Math" panose="02040503050406030204" pitchFamily="18" charset="0"/>
+                                          </a:rPr>
                                           <m:t>𝑃</m:t>
                                         </m:r>
                                       </m:e>
                                       <m:sub>
                                         <m:r>
-                                          <a:rPr lang="ar-AE" sz="1400"/>
+                                          <a:rPr lang="ar-AE" sz="1400">
+                                            <a:latin typeface="Cambria Math" panose="02040503050406030204" pitchFamily="18" charset="0"/>
+                                          </a:rPr>
                                           <m:t>𝑔</m:t>
                                         </m:r>
                                       </m:sub>
@@ -6381,51 +6656,69 @@
                                   </m:num>
                                   <m:den>
                                     <m:r>
-                                      <a:rPr lang="ar-AE" sz="1400"/>
+                                      <a:rPr lang="ar-AE" sz="1400">
+                                        <a:latin typeface="Cambria Math" panose="02040503050406030204" pitchFamily="18" charset="0"/>
+                                      </a:rPr>
                                       <m:t>𝑇</m:t>
                                     </m:r>
                                     <m:sSub>
                                       <m:sSubPr>
                                         <m:ctrlPr>
-                                          <a:rPr lang="ar-AE" sz="1400"/>
+                                          <a:rPr lang="ar-AE" sz="1400" i="1">
+                                            <a:latin typeface="Cambria Math" panose="02040503050406030204" pitchFamily="18" charset="0"/>
+                                          </a:rPr>
                                         </m:ctrlPr>
                                       </m:sSubPr>
                                       <m:e>
                                         <m:r>
-                                          <a:rPr lang="ar-AE" sz="1400"/>
+                                          <a:rPr lang="ar-AE" sz="1400">
+                                            <a:latin typeface="Cambria Math" panose="02040503050406030204" pitchFamily="18" charset="0"/>
+                                          </a:rPr>
                                           <m:t>𝑃</m:t>
                                         </m:r>
                                       </m:e>
                                       <m:sub>
                                         <m:r>
-                                          <a:rPr lang="ar-AE" sz="1400"/>
+                                          <a:rPr lang="ar-AE" sz="1400">
+                                            <a:latin typeface="Cambria Math" panose="02040503050406030204" pitchFamily="18" charset="0"/>
+                                          </a:rPr>
                                           <m:t>𝑔</m:t>
                                         </m:r>
                                       </m:sub>
                                     </m:sSub>
                                     <m:r>
-                                      <a:rPr lang="ar-AE" sz="1400"/>
+                                      <a:rPr lang="ar-AE" sz="1400">
+                                        <a:latin typeface="Cambria Math" panose="02040503050406030204" pitchFamily="18" charset="0"/>
+                                      </a:rPr>
                                       <m:t>+</m:t>
                                     </m:r>
                                     <m:r>
-                                      <a:rPr lang="ar-AE" sz="1400"/>
+                                      <a:rPr lang="ar-AE" sz="1400">
+                                        <a:latin typeface="Cambria Math" panose="02040503050406030204" pitchFamily="18" charset="0"/>
+                                      </a:rPr>
                                       <m:t>𝐹</m:t>
                                     </m:r>
                                     <m:sSub>
                                       <m:sSubPr>
                                         <m:ctrlPr>
-                                          <a:rPr lang="ar-AE" sz="1400"/>
+                                          <a:rPr lang="ar-AE" sz="1400" i="1">
+                                            <a:latin typeface="Cambria Math" panose="02040503050406030204" pitchFamily="18" charset="0"/>
+                                          </a:rPr>
                                         </m:ctrlPr>
                                       </m:sSubPr>
                                       <m:e>
                                         <m:r>
-                                          <a:rPr lang="ar-AE" sz="1400"/>
+                                          <a:rPr lang="ar-AE" sz="1400">
+                                            <a:latin typeface="Cambria Math" panose="02040503050406030204" pitchFamily="18" charset="0"/>
+                                          </a:rPr>
                                           <m:t>𝑁</m:t>
                                         </m:r>
                                       </m:e>
                                       <m:sub>
                                         <m:r>
-                                          <a:rPr lang="ar-AE" sz="1400"/>
+                                          <a:rPr lang="ar-AE" sz="1400">
+                                            <a:latin typeface="Cambria Math" panose="02040503050406030204" pitchFamily="18" charset="0"/>
+                                          </a:rPr>
                                           <m:t>𝑔</m:t>
                                         </m:r>
                                       </m:sub>
@@ -6561,13 +6854,17 @@
                               </m:oMathParaPr>
                               <m:oMath xmlns:m="http://schemas.openxmlformats.org/officeDocument/2006/math">
                                 <m:r>
-                                  <a:rPr lang="ar-AE" sz="1400"/>
+                                  <a:rPr lang="ar-AE" sz="1400">
+                                    <a:latin typeface="Cambria Math" panose="02040503050406030204" pitchFamily="18" charset="0"/>
+                                  </a:rPr>
                                   <m:t>𝑃</m:t>
                                 </m:r>
                                 <m:d>
                                   <m:dPr>
                                     <m:ctrlPr>
-                                      <a:rPr lang="ar-AE" sz="1400"/>
+                                      <a:rPr lang="ar-AE" sz="1400" i="1">
+                                        <a:latin typeface="Cambria Math" panose="02040503050406030204" pitchFamily="18" charset="0"/>
+                                      </a:rPr>
                                     </m:ctrlPr>
                                   </m:dPr>
                                   <m:e>
@@ -6575,38 +6872,54 @@
                                       <m:accPr>
                                         <m:chr m:val="̂"/>
                                         <m:ctrlPr>
-                                          <a:rPr lang="ar-AE" sz="1400"/>
+                                          <a:rPr lang="ar-AE" sz="1400" i="1">
+                                            <a:latin typeface="Cambria Math" panose="02040503050406030204" pitchFamily="18" charset="0"/>
+                                          </a:rPr>
                                         </m:ctrlPr>
                                       </m:accPr>
                                       <m:e>
                                         <m:r>
-                                          <a:rPr lang="ar-AE" sz="1400"/>
+                                          <a:rPr lang="ar-AE" sz="1400">
+                                            <a:latin typeface="Cambria Math" panose="02040503050406030204" pitchFamily="18" charset="0"/>
+                                          </a:rPr>
                                           <m:t>𝑌</m:t>
                                         </m:r>
                                       </m:e>
                                     </m:acc>
                                     <m:r>
-                                      <a:rPr lang="ar-AE" sz="1400"/>
+                                      <a:rPr lang="ar-AE" sz="1400">
+                                        <a:latin typeface="Cambria Math" panose="02040503050406030204" pitchFamily="18" charset="0"/>
+                                      </a:rPr>
                                       <m:t>=</m:t>
                                     </m:r>
                                     <m:r>
-                                      <a:rPr lang="ar-AE" sz="1400"/>
+                                      <a:rPr lang="ar-AE" sz="1400">
+                                        <a:latin typeface="Cambria Math" panose="02040503050406030204" pitchFamily="18" charset="0"/>
+                                      </a:rPr>
                                       <m:t>1</m:t>
                                     </m:r>
                                     <m:r>
-                                      <a:rPr lang="ar-AE" sz="1400"/>
+                                      <a:rPr lang="ar-AE" sz="1400">
+                                        <a:latin typeface="Cambria Math" panose="02040503050406030204" pitchFamily="18" charset="0"/>
+                                      </a:rPr>
                                       <m:t>∣</m:t>
                                     </m:r>
                                     <m:r>
-                                      <a:rPr lang="ar-AE" sz="1400"/>
+                                      <a:rPr lang="ar-AE" sz="1400">
+                                        <a:latin typeface="Cambria Math" panose="02040503050406030204" pitchFamily="18" charset="0"/>
+                                      </a:rPr>
                                       <m:t>𝐴</m:t>
                                     </m:r>
                                     <m:r>
-                                      <a:rPr lang="ar-AE" sz="1400"/>
+                                      <a:rPr lang="ar-AE" sz="1400">
+                                        <a:latin typeface="Cambria Math" panose="02040503050406030204" pitchFamily="18" charset="0"/>
+                                      </a:rPr>
                                       <m:t>=</m:t>
                                     </m:r>
                                     <m:r>
-                                      <a:rPr lang="ar-AE" sz="1400"/>
+                                      <a:rPr lang="ar-AE" sz="1400">
+                                        <a:latin typeface="Cambria Math" panose="02040503050406030204" pitchFamily="18" charset="0"/>
+                                      </a:rPr>
                                       <m:t>𝑔</m:t>
                                     </m:r>
                                   </m:e>
@@ -6807,7 +7120,7 @@
             </a:graphic>
           </p:graphicFrame>
         </mc:Choice>
-        <mc:Fallback>
+        <mc:Fallback xmlns="">
           <p:graphicFrame>
             <p:nvGraphicFramePr>
               <p:cNvPr id="7" name="Content Placeholder 6">
